--- a/docs/pptx/Ch8_SUPPLEMENT.pptx
+++ b/docs/pptx/Ch8_SUPPLEMENT.pptx
@@ -504,10 +504,23 @@
           <a:lstStyle/>
           <a:p>
             <a:r>
-              <a:rPr lang="en-US" dirty="0"/>
-              <a:t/>
-            </a:r>
-            <a:endParaRPr lang="en-US" dirty="0"/>
+              <a:t>PROF: Exercice CRUD complet avec LinkedList + HashMap.</a:t>
+            </a:r>
+          </a:p>
+          <a:p>
+            <a:r>
+              <a:t>Scénario : annuaire téléphonique.</a:t>
+            </a:r>
+          </a:p>
+          <a:p>
+            <a:r>
+              <a:t>Classe Contact (nom, téléphone) + GestionContacts.</a:t>
+            </a:r>
+          </a:p>
+          <a:p>
+            <a:r>
+              <a:t>Durée : 40 min coding + 15 min tests manuels.</a:t>
+            </a:r>
           </a:p>
         </p:txBody>
       </p:sp>
@@ -592,10 +605,18 @@
           <a:lstStyle/>
           <a:p>
             <a:r>
-              <a:rPr lang="en-US" dirty="0"/>
-              <a:t/>
-            </a:r>
-            <a:endParaRPr lang="en-US" dirty="0"/>
+              <a:t>PROF: Questions sur le choix de structure.</a:t>
+            </a:r>
+          </a:p>
+          <a:p>
+            <a:r>
+              <a:t>'Pourquoi HashMap plutôt que ArrayList pour la recherche par nom ?'</a:t>
+            </a:r>
+          </a:p>
+          <a:p>
+            <a:r>
+              <a:t>Faire calculer la complexité de chaque opération.</a:t>
+            </a:r>
           </a:p>
         </p:txBody>
       </p:sp>
@@ -680,10 +701,13 @@
           <a:lstStyle/>
           <a:p>
             <a:r>
-              <a:rPr lang="en-US" dirty="0"/>
-              <a:t/>
-            </a:r>
-            <a:endParaRPr lang="en-US" dirty="0"/>
+              <a:t>PROF: Récap comparatif LinkedList vs ArrayList vs HashMap.</a:t>
+            </a:r>
+          </a:p>
+          <a:p>
+            <a:r>
+              <a:t>Tableau à compléter par les étudiants.</a:t>
+            </a:r>
           </a:p>
         </p:txBody>
       </p:sp>
@@ -768,10 +792,13 @@
           <a:lstStyle/>
           <a:p>
             <a:r>
-              <a:rPr lang="en-US" dirty="0"/>
-              <a:t/>
-            </a:r>
-            <a:endParaRPr lang="en-US" dirty="0"/>
+              <a:t>PROF: Exemple de code complet à analyser.</a:t>
+            </a:r>
+          </a:p>
+          <a:p>
+            <a:r>
+              <a:t>Demander : 'Que se passe-t-il si on ajoute une clé qui existe déjà dans le HashMap ?' → écrasement.</a:t>
+            </a:r>
           </a:p>
         </p:txBody>
       </p:sp>
